--- a/Doc/04-c-第0期实验汇报.pptx
+++ b/Doc/04-c-第0期实验汇报.pptx
@@ -3196,7 +3196,7 @@
                 <a:latin typeface="Microsoft YaHei"/>
                 <a:ea typeface="Microsoft YaHei"/>
               </a:rPr>
-              <a:t>英飞凌 demo 短窗口不够当过关，我们补 SOC 与电阻怎么拆</a:t>
+              <a:t>先讲英飞凌 demo 的网络和 SOC，再讲我们怎么拆开做</a:t>
             </a:r>
           </a:p>
         </p:txBody>
@@ -3416,7 +3416,7 @@
                           <a:latin typeface="Microsoft YaHei"/>
                           <a:ea typeface="Microsoft YaHei"/>
                         </a:rPr>
-                        <a:t>23 mV</a:t>
+                        <a:t>26 mV</a:t>
                       </a:r>
                     </a:p>
                   </a:txBody>
@@ -3440,7 +3440,7 @@
                           <a:latin typeface="Microsoft YaHei"/>
                           <a:ea typeface="Microsoft YaHei"/>
                         </a:rPr>
-                        <a:t>4 mV</a:t>
+                        <a:t>7.8 mV</a:t>
                       </a:r>
                     </a:p>
                   </a:txBody>
@@ -3514,7 +3514,7 @@
                           <a:latin typeface="Microsoft YaHei"/>
                           <a:ea typeface="Microsoft YaHei"/>
                         </a:rPr>
-                        <a:t>约 7 mV</a:t>
+                        <a:t>8.7 mV</a:t>
                       </a:r>
                     </a:p>
                   </a:txBody>
@@ -3538,7 +3538,7 @@
                           <a:latin typeface="Microsoft YaHei"/>
                           <a:ea typeface="Microsoft YaHei"/>
                         </a:rPr>
-                        <a:t>22 mV</a:t>
+                        <a:t>24 mV</a:t>
                       </a:r>
                     </a:p>
                   </a:txBody>
@@ -3562,7 +3562,7 @@
                           <a:latin typeface="Microsoft YaHei"/>
                           <a:ea typeface="Microsoft YaHei"/>
                         </a:rPr>
-                        <a:t>约 1.20，两通道齐</a:t>
+                        <a:t>约 1.18，两通道齐</a:t>
                       </a:r>
                     </a:p>
                   </a:txBody>
@@ -3612,7 +3612,7 @@
                           <a:latin typeface="Microsoft YaHei"/>
                           <a:ea typeface="Microsoft YaHei"/>
                         </a:rPr>
-                        <a:t>6 mV，最好</a:t>
+                        <a:t>last 20 mV</a:t>
                       </a:r>
                     </a:p>
                   </a:txBody>
@@ -3636,7 +3636,7 @@
                           <a:latin typeface="Microsoft YaHei"/>
                           <a:ea typeface="Microsoft YaHei"/>
                         </a:rPr>
-                        <a:t>18 mV</a:t>
+                        <a:t>17 mV</a:t>
                       </a:r>
                     </a:p>
                   </a:txBody>
@@ -3684,7 +3684,7 @@
         <p:spPr>
           <a:xfrm>
             <a:off x="548640" y="2880360"/>
-            <a:ext cx="9601200" cy="1188720"/>
+            <a:ext cx="9601200" cy="1645920"/>
           </a:xfrm>
           <a:prstGeom prst="rect">
             <a:avLst/>
@@ -3713,7 +3713,27 @@
                 <a:latin typeface="Microsoft YaHei"/>
                 <a:ea typeface="Microsoft YaHei"/>
               </a:rPr>
-              <a:t>结论：整体涨阻，只动两个乘子。旧网格变差是缺寿命维的正常结果，不是遗忘失败。</a:t>
+              <a:t>结论：整体涨阻，只动两个乘子。旧网格变差是缺寿命维的正常结果，不是遗忘失败。100 轮底板 7.8 mV。</a:t>
+            </a:r>
+          </a:p>
+          <a:p>
+            <a:pPr algn="l">
+              <a:lnSpc>
+                <a:spcPct val="115000"/>
+              </a:lnSpc>
+              <a:spcAft>
+                <a:spcPts val="800"/>
+              </a:spcAft>
+            </a:pPr>
+            <a:r>
+              <a:rPr sz="1600" b="0">
+                <a:solidFill>
+                  <a:srgbClr val="222222"/>
+                </a:solidFill>
+                <a:latin typeface="Microsoft YaHei"/>
+                <a:ea typeface="Microsoft YaHei"/>
+              </a:rPr>
+              <a:t>D 抬噪声后吃测量列：相对 A 的 7.8 mV，冻结旧集 11.8 mV（+4 mV）。缩放仍把新年份降回 12 mV，乘子仍然齐。</a:t>
             </a:r>
           </a:p>
         </p:txBody>
@@ -4900,7 +4920,7 @@
                 <a:latin typeface="Microsoft YaHei"/>
                 <a:ea typeface="Microsoft YaHei"/>
               </a:rPr>
-              <a:t>测量列相对真值列偏多少？墙仍是电阻幅度。底板差约 3.6 mV，主因是训次没对齐。这题只答了一半。</a:t>
+              <a:t>测量列相对真值列偏多少？墙仍是电阻幅度。A、D 都训 100 轮，列差约 +4 mV。不必追 4 mV。</a:t>
             </a:r>
           </a:p>
           <a:p>
@@ -5057,7 +5077,7 @@
                 <a:latin typeface="Microsoft YaHei"/>
                 <a:ea typeface="Microsoft YaHei"/>
               </a:rPr>
-              <a:t>记下了但还没补：测量列 / 填洞舰队只训了 100 轮；小时级没有强行微调。不影响结题口径。</a:t>
+              <a:t>记下了但还没补：填洞舰队只训了 100 轮；小时级没有强行微调。不影响结题口径。</a:t>
             </a:r>
           </a:p>
           <a:p>
@@ -5194,7 +5214,7 @@
                 <a:latin typeface="Microsoft YaHei"/>
                 <a:ea typeface="Microsoft YaHei"/>
               </a:rPr>
-              <a:t>这期不是再做一个更炫的小网。</a:t>
+              <a:t>起因是英飞凌现场 demo：小网按拍反传，短窗口看起来过关。</a:t>
             </a:r>
           </a:p>
           <a:p>
@@ -5214,27 +5234,7 @@
                 <a:latin typeface="Microsoft YaHei"/>
                 <a:ea typeface="Microsoft YaHei"/>
               </a:rPr>
-              <a:t>英飞凌 demo 放 300 秒可以报 SOC 1% 以内；时间一拉长，容量错和电流零偏会把安时拉开。</a:t>
-            </a:r>
-          </a:p>
-          <a:p>
-            <a:pPr algn="l">
-              <a:lnSpc>
-                <a:spcPct val="115000"/>
-              </a:lnSpc>
-              <a:spcAft>
-                <a:spcPts val="800"/>
-              </a:spcAft>
-            </a:pPr>
-            <a:r>
-              <a:rPr sz="1600" b="0">
-                <a:solidFill>
-                  <a:srgbClr val="222222"/>
-                </a:solidFill>
-                <a:latin typeface="Microsoft YaHei"/>
-                <a:ea typeface="Microsoft YaHei"/>
-              </a:rPr>
-              <a:t>要先证明：电阻表该不该改、该怎么改。不能只看电压变好，更不能只看五分钟的 SOC。</a:t>
+              <a:t>拉长时间，SOC 和电阻都会出问题。这期把它们拆开对照。</a:t>
             </a:r>
           </a:p>
         </p:txBody>
@@ -5288,7 +5288,7 @@
                 <a:latin typeface="Microsoft YaHei"/>
                 <a:ea typeface="Microsoft YaHei"/>
               </a:rPr>
-              <a:t>英飞凌 demo 不够好，窗口还太短</a:t>
+              <a:t>英飞凌 demo 在做什么</a:t>
             </a:r>
           </a:p>
         </p:txBody>
@@ -5331,7 +5331,7 @@
                 <a:latin typeface="Microsoft YaHei"/>
                 <a:ea typeface="Microsoft YaHei"/>
               </a:rPr>
-              <a:t>现场结构：3×8×2 小网，电阻 = 规格书点 + 网络残差。电压偏过 10 mV 就按拍反传。</a:t>
+              <a:t>SOC 侧也有 EKF。OCV 不是查表，是冻死的 1×4×8×4×1，和 PyBaMM 最差大约差 30 mV。</a:t>
             </a:r>
           </a:p>
           <a:p>
@@ -5351,7 +5351,7 @@
                 <a:latin typeface="Microsoft YaHei"/>
                 <a:ea typeface="Microsoft YaHei"/>
               </a:rPr>
-              <a:t>对外放了大约 300 秒，SOC 误差报 1% 以内。</a:t>
+              <a:t>电阻侧 3×8×2：规格书点 + 网络残差。电压偏过 10 mV 就按拍反传。</a:t>
             </a:r>
           </a:p>
           <a:p>
@@ -5371,7 +5371,7 @@
                 <a:latin typeface="Microsoft YaHei"/>
                 <a:ea typeface="Microsoft YaHei"/>
               </a:rPr>
-              <a:t>300 秒在 1C 上只走约 8 个百分点 SOC。容量错 5%，或零偏 5 A，积分都只有约 0.4 个百分点，还在 1% 里。</a:t>
+              <a:t>对外放大约 300 秒，SOC 误差报 1% 以内。看起来像卡尔曼加边缘增量。</a:t>
             </a:r>
           </a:p>
           <a:p>
@@ -5391,7 +5391,7 @@
                 <a:latin typeface="Microsoft YaHei"/>
                 <a:ea typeface="Microsoft YaHei"/>
               </a:rPr>
-              <a:t>这不是估准了，是安时误差还没长出来。车上是快充几十分钟、停车几小时，不是 300 秒展台。</a:t>
+              <a:t>拆开以后，网络和 SOC 是两类不同的病。不是他们没上 EKF。</a:t>
             </a:r>
           </a:p>
         </p:txBody>
@@ -5445,344 +5445,21 @@
                 <a:latin typeface="Microsoft YaHei"/>
                 <a:ea typeface="Microsoft YaHei"/>
               </a:rPr>
-              <a:t>300 秒结构上验不出积分误差</a:t>
-            </a:r>
-          </a:p>
-        </p:txBody>
-      </p:sp>
-      <p:graphicFrame>
-        <p:nvGraphicFramePr>
-          <p:cNvPr id="3" name="Table 2"/>
-          <p:cNvGraphicFramePr>
-            <a:graphicFrameLocks noGrp="1"/>
-          </p:cNvGraphicFramePr>
-          <p:nvPr/>
-        </p:nvGraphicFramePr>
-        <p:xfrm>
-          <a:off x="548640" y="1005840"/>
-          <a:ext cx="7772400" cy="1463040"/>
-        </p:xfrm>
-        <a:graphic>
-          <a:graphicData uri="http://schemas.openxmlformats.org/drawingml/2006/table">
-            <a:tbl>
-              <a:tblPr firstRow="1" bandRow="1">
-                <a:tableStyleId>{5C22544A-7EE6-4342-B048-85BDC9FD1C3A}</a:tableStyleId>
-              </a:tblPr>
-              <a:tblGrid>
-                <a:gridCol w="2377440"/>
-                <a:gridCol w="3200400"/>
-                <a:gridCol w="2194560"/>
-              </a:tblGrid>
-              <a:tr h="365760">
-                <a:tc>
-                  <a:txBody>
-                    <a:bodyPr wrap="square" lIns="73152" rIns="73152"/>
-                    <a:lstStyle/>
-                    <a:p>
-                      <a:pPr algn="l"/>
-                      <a:r>
-                        <a:rPr sz="1600" b="1">
-                          <a:solidFill>
-                            <a:srgbClr val="222222"/>
-                          </a:solidFill>
-                          <a:latin typeface="Microsoft YaHei"/>
-                          <a:ea typeface="Microsoft YaHei"/>
-                        </a:rPr>
-                        <a:t>错配</a:t>
-                      </a:r>
-                    </a:p>
-                  </a:txBody>
-                  <a:tcPr anchor="ctr">
-                    <a:solidFill>
-                      <a:srgbClr val="F0F0F0"/>
-                    </a:solidFill>
-                  </a:tcPr>
-                </a:tc>
-                <a:tc>
-                  <a:txBody>
-                    <a:bodyPr wrap="square" lIns="73152" rIns="73152"/>
-                    <a:lstStyle/>
-                    <a:p>
-                      <a:pPr algn="l"/>
-                      <a:r>
-                        <a:rPr sz="1600" b="1">
-                          <a:solidFill>
-                            <a:srgbClr val="222222"/>
-                          </a:solidFill>
-                          <a:latin typeface="Microsoft YaHei"/>
-                          <a:ea typeface="Microsoft YaHei"/>
-                        </a:rPr>
-                        <a:t>300 秒、1C 上安时会偏</a:t>
-                      </a:r>
-                    </a:p>
-                  </a:txBody>
-                  <a:tcPr anchor="ctr">
-                    <a:solidFill>
-                      <a:srgbClr val="F0F0F0"/>
-                    </a:solidFill>
-                  </a:tcPr>
-                </a:tc>
-                <a:tc>
-                  <a:txBody>
-                    <a:bodyPr wrap="square" lIns="73152" rIns="73152"/>
-                    <a:lstStyle/>
-                    <a:p>
-                      <a:pPr algn="l"/>
-                      <a:r>
-                        <a:rPr sz="1600" b="1">
-                          <a:solidFill>
-                            <a:srgbClr val="222222"/>
-                          </a:solidFill>
-                          <a:latin typeface="Microsoft YaHei"/>
-                          <a:ea typeface="Microsoft YaHei"/>
-                        </a:rPr>
-                        <a:t>进不进 1%</a:t>
-                      </a:r>
-                    </a:p>
-                  </a:txBody>
-                  <a:tcPr anchor="ctr">
-                    <a:solidFill>
-                      <a:srgbClr val="F0F0F0"/>
-                    </a:solidFill>
-                  </a:tcPr>
-                </a:tc>
-              </a:tr>
-              <a:tr h="365760">
-                <a:tc>
-                  <a:txBody>
-                    <a:bodyPr wrap="square" lIns="73152" rIns="73152"/>
-                    <a:lstStyle/>
-                    <a:p>
-                      <a:pPr algn="l"/>
-                      <a:r>
-                        <a:rPr sz="1600" b="0">
-                          <a:solidFill>
-                            <a:srgbClr val="222222"/>
-                          </a:solidFill>
-                          <a:latin typeface="Microsoft YaHei"/>
-                          <a:ea typeface="Microsoft YaHei"/>
-                        </a:rPr>
-                        <a:t>容量打九五折</a:t>
-                      </a:r>
-                    </a:p>
-                  </a:txBody>
-                  <a:tcPr anchor="ctr">
-                    <a:solidFill>
-                      <a:srgbClr val="FFFFFF"/>
-                    </a:solidFill>
-                  </a:tcPr>
-                </a:tc>
-                <a:tc>
-                  <a:txBody>
-                    <a:bodyPr wrap="square" lIns="73152" rIns="73152"/>
-                    <a:lstStyle/>
-                    <a:p>
-                      <a:pPr algn="l"/>
-                      <a:r>
-                        <a:rPr sz="1600" b="0">
-                          <a:solidFill>
-                            <a:srgbClr val="222222"/>
-                          </a:solidFill>
-                          <a:latin typeface="Microsoft YaHei"/>
-                          <a:ea typeface="Microsoft YaHei"/>
-                        </a:rPr>
-                        <a:t>约 0.44 个百分点</a:t>
-                      </a:r>
-                    </a:p>
-                  </a:txBody>
-                  <a:tcPr anchor="ctr">
-                    <a:solidFill>
-                      <a:srgbClr val="FFFFFF"/>
-                    </a:solidFill>
-                  </a:tcPr>
-                </a:tc>
-                <a:tc>
-                  <a:txBody>
-                    <a:bodyPr wrap="square" lIns="73152" rIns="73152"/>
-                    <a:lstStyle/>
-                    <a:p>
-                      <a:pPr algn="l"/>
-                      <a:r>
-                        <a:rPr sz="1600" b="0">
-                          <a:solidFill>
-                            <a:srgbClr val="222222"/>
-                          </a:solidFill>
-                          <a:latin typeface="Microsoft YaHei"/>
-                          <a:ea typeface="Microsoft YaHei"/>
-                        </a:rPr>
-                        <a:t>进</a:t>
-                      </a:r>
-                    </a:p>
-                  </a:txBody>
-                  <a:tcPr anchor="ctr">
-                    <a:solidFill>
-                      <a:srgbClr val="FFFFFF"/>
-                    </a:solidFill>
-                  </a:tcPr>
-                </a:tc>
-              </a:tr>
-              <a:tr h="365760">
-                <a:tc>
-                  <a:txBody>
-                    <a:bodyPr wrap="square" lIns="73152" rIns="73152"/>
-                    <a:lstStyle/>
-                    <a:p>
-                      <a:pPr algn="l"/>
-                      <a:r>
-                        <a:rPr sz="1600" b="0">
-                          <a:solidFill>
-                            <a:srgbClr val="222222"/>
-                          </a:solidFill>
-                          <a:latin typeface="Microsoft YaHei"/>
-                          <a:ea typeface="Microsoft YaHei"/>
-                        </a:rPr>
-                        <a:t>5 A 电流零偏</a:t>
-                      </a:r>
-                    </a:p>
-                  </a:txBody>
-                  <a:tcPr anchor="ctr">
-                    <a:solidFill>
-                      <a:srgbClr val="FFFFFF"/>
-                    </a:solidFill>
-                  </a:tcPr>
-                </a:tc>
-                <a:tc>
-                  <a:txBody>
-                    <a:bodyPr wrap="square" lIns="73152" rIns="73152"/>
-                    <a:lstStyle/>
-                    <a:p>
-                      <a:pPr algn="l"/>
-                      <a:r>
-                        <a:rPr sz="1600" b="0">
-                          <a:solidFill>
-                            <a:srgbClr val="222222"/>
-                          </a:solidFill>
-                          <a:latin typeface="Microsoft YaHei"/>
-                          <a:ea typeface="Microsoft YaHei"/>
-                        </a:rPr>
-                        <a:t>约 0.42 个百分点</a:t>
-                      </a:r>
-                    </a:p>
-                  </a:txBody>
-                  <a:tcPr anchor="ctr">
-                    <a:solidFill>
-                      <a:srgbClr val="FFFFFF"/>
-                    </a:solidFill>
-                  </a:tcPr>
-                </a:tc>
-                <a:tc>
-                  <a:txBody>
-                    <a:bodyPr wrap="square" lIns="73152" rIns="73152"/>
-                    <a:lstStyle/>
-                    <a:p>
-                      <a:pPr algn="l"/>
-                      <a:r>
-                        <a:rPr sz="1600" b="0">
-                          <a:solidFill>
-                            <a:srgbClr val="222222"/>
-                          </a:solidFill>
-                          <a:latin typeface="Microsoft YaHei"/>
-                          <a:ea typeface="Microsoft YaHei"/>
-                        </a:rPr>
-                        <a:t>进</a:t>
-                      </a:r>
-                    </a:p>
-                  </a:txBody>
-                  <a:tcPr anchor="ctr">
-                    <a:solidFill>
-                      <a:srgbClr val="FFFFFF"/>
-                    </a:solidFill>
-                  </a:tcPr>
-                </a:tc>
-              </a:tr>
-              <a:tr h="365760">
-                <a:tc>
-                  <a:txBody>
-                    <a:bodyPr wrap="square" lIns="73152" rIns="73152"/>
-                    <a:lstStyle/>
-                    <a:p>
-                      <a:pPr algn="l"/>
-                      <a:r>
-                        <a:rPr sz="1600" b="0">
-                          <a:solidFill>
-                            <a:srgbClr val="222222"/>
-                          </a:solidFill>
-                          <a:latin typeface="Microsoft YaHei"/>
-                          <a:ea typeface="Microsoft YaHei"/>
-                        </a:rPr>
-                        <a:t>容量错 10%</a:t>
-                      </a:r>
-                    </a:p>
-                  </a:txBody>
-                  <a:tcPr anchor="ctr">
-                    <a:solidFill>
-                      <a:srgbClr val="FFFFFF"/>
-                    </a:solidFill>
-                  </a:tcPr>
-                </a:tc>
-                <a:tc>
-                  <a:txBody>
-                    <a:bodyPr wrap="square" lIns="73152" rIns="73152"/>
-                    <a:lstStyle/>
-                    <a:p>
-                      <a:pPr algn="l"/>
-                      <a:r>
-                        <a:rPr sz="1600" b="0">
-                          <a:solidFill>
-                            <a:srgbClr val="222222"/>
-                          </a:solidFill>
-                          <a:latin typeface="Microsoft YaHei"/>
-                          <a:ea typeface="Microsoft YaHei"/>
-                        </a:rPr>
-                        <a:t>约 0.93 个百分点</a:t>
-                      </a:r>
-                    </a:p>
-                  </a:txBody>
-                  <a:tcPr anchor="ctr">
-                    <a:solidFill>
-                      <a:srgbClr val="FFFFFF"/>
-                    </a:solidFill>
-                  </a:tcPr>
-                </a:tc>
-                <a:tc>
-                  <a:txBody>
-                    <a:bodyPr wrap="square" lIns="73152" rIns="73152"/>
-                    <a:lstStyle/>
-                    <a:p>
-                      <a:pPr algn="l"/>
-                      <a:r>
-                        <a:rPr sz="1600" b="0">
-                          <a:solidFill>
-                            <a:srgbClr val="222222"/>
-                          </a:solidFill>
-                          <a:latin typeface="Microsoft YaHei"/>
-                          <a:ea typeface="Microsoft YaHei"/>
-                        </a:rPr>
-                        <a:t>刚进</a:t>
-                      </a:r>
-                    </a:p>
-                  </a:txBody>
-                  <a:tcPr anchor="ctr">
-                    <a:solidFill>
-                      <a:srgbClr val="FFFFFF"/>
-                    </a:solidFill>
-                  </a:tcPr>
-                </a:tc>
-              </a:tr>
-            </a:tbl>
-          </a:graphicData>
-        </a:graphic>
-      </p:graphicFrame>
-      <p:sp>
-        <p:nvSpPr>
-          <p:cNvPr id="4" name="TextBox 3"/>
+              <a:t>网络：太小，而且不像在学曲面</a:t>
+            </a:r>
+          </a:p>
+        </p:txBody>
+      </p:sp>
+      <p:sp>
+        <p:nvSpPr>
+          <p:cNvPr id="3" name="TextBox 2"/>
           <p:cNvSpPr txBox="1"/>
           <p:nvPr/>
         </p:nvSpPr>
         <p:spPr>
           <a:xfrm>
-            <a:off x="548640" y="2743200"/>
-            <a:ext cx="7772400" cy="1280160"/>
+            <a:off x="548640" y="960120"/>
+            <a:ext cx="5760720" cy="5303520"/>
           </a:xfrm>
           <a:prstGeom prst="rect">
             <a:avLst/>
@@ -5811,7 +5488,47 @@
                 <a:latin typeface="Microsoft YaHei"/>
                 <a:ea typeface="Microsoft YaHei"/>
               </a:rPr>
-              <a:t>要让 5% 容量错配顶破 1%，净安时得超过约 19 Ah：1C 大约 11 分钟，0.3C 大约 38 分钟。</a:t>
+              <a:t>8 个隐单元撑不起整张电阻曲面。增量还冻前层，每芯真正能改的只有 18 个数。</a:t>
+            </a:r>
+          </a:p>
+          <a:p>
+            <a:pPr algn="l">
+              <a:lnSpc>
+                <a:spcPct val="115000"/>
+              </a:lnSpc>
+              <a:spcAft>
+                <a:spcPts val="800"/>
+              </a:spcAft>
+            </a:pPr>
+            <a:r>
+              <a:rPr sz="1600" b="0">
+                <a:solidFill>
+                  <a:srgbClr val="222222"/>
+                </a:solidFill>
+                <a:latin typeface="Microsoft YaHei"/>
+                <a:ea typeface="Microsoft YaHei"/>
+              </a:rPr>
+              <a:t>运行起来像参数辨识器：8 个冻住的特征当回归量，18 个数当参数，用电压误差逐步刷。</a:t>
+            </a:r>
+          </a:p>
+          <a:p>
+            <a:pPr algn="l">
+              <a:lnSpc>
+                <a:spcPct val="115000"/>
+              </a:lnSpc>
+              <a:spcAft>
+                <a:spcPts val="800"/>
+              </a:spcAft>
+            </a:pPr>
+            <a:r>
+              <a:rPr sz="1600" b="0">
+                <a:solidFill>
+                  <a:srgbClr val="222222"/>
+                </a:solidFill>
+                <a:latin typeface="Microsoft YaHei"/>
+                <a:ea typeface="Microsoft YaHei"/>
+              </a:rPr>
+              <a:t>没有协方差，没有遗忘因子。函数形式带着电流、SOC、温度，统计行为是跟当前这一段工况。</a:t>
             </a:r>
           </a:p>
         </p:txBody>
@@ -5865,441 +5582,21 @@
                 <a:latin typeface="Microsoft YaHei"/>
                 <a:ea typeface="Microsoft YaHei"/>
               </a:rPr>
-              <a:t>同一套错配，拉到两小时</a:t>
-            </a:r>
-          </a:p>
-        </p:txBody>
-      </p:sp>
-      <p:graphicFrame>
-        <p:nvGraphicFramePr>
-          <p:cNvPr id="3" name="Table 2"/>
-          <p:cNvGraphicFramePr>
-            <a:graphicFrameLocks noGrp="1"/>
-          </p:cNvGraphicFramePr>
-          <p:nvPr/>
-        </p:nvGraphicFramePr>
-        <p:xfrm>
-          <a:off x="548640" y="1005840"/>
-          <a:ext cx="9601200" cy="1463040"/>
-        </p:xfrm>
-        <a:graphic>
-          <a:graphicData uri="http://schemas.openxmlformats.org/drawingml/2006/table">
-            <a:tbl>
-              <a:tblPr firstRow="1" bandRow="1">
-                <a:tableStyleId>{5C22544A-7EE6-4342-B048-85BDC9FD1C3A}</a:tableStyleId>
-              </a:tblPr>
-              <a:tblGrid>
-                <a:gridCol w="2286000"/>
-                <a:gridCol w="2377440"/>
-                <a:gridCol w="2468880"/>
-                <a:gridCol w="2468880"/>
-              </a:tblGrid>
-              <a:tr h="365760">
-                <a:tc>
-                  <a:txBody>
-                    <a:bodyPr wrap="square" lIns="73152" rIns="73152"/>
-                    <a:lstStyle/>
-                    <a:p>
-                      <a:pPr algn="l"/>
-                      <a:r>
-                        <a:rPr sz="1600" b="1">
-                          <a:solidFill>
-                            <a:srgbClr val="222222"/>
-                          </a:solidFill>
-                          <a:latin typeface="Microsoft YaHei"/>
-                          <a:ea typeface="Microsoft YaHei"/>
-                        </a:rPr>
-                        <a:t>错配</a:t>
-                      </a:r>
-                    </a:p>
-                  </a:txBody>
-                  <a:tcPr anchor="ctr">
-                    <a:solidFill>
-                      <a:srgbClr val="F0F0F0"/>
-                    </a:solidFill>
-                  </a:tcPr>
-                </a:tc>
-                <a:tc>
-                  <a:txBody>
-                    <a:bodyPr wrap="square" lIns="73152" rIns="73152"/>
-                    <a:lstStyle/>
-                    <a:p>
-                      <a:pPr algn="l"/>
-                      <a:r>
-                        <a:rPr sz="1600" b="1">
-                          <a:solidFill>
-                            <a:srgbClr val="222222"/>
-                          </a:solidFill>
-                          <a:latin typeface="Microsoft YaHei"/>
-                          <a:ea typeface="Microsoft YaHei"/>
-                        </a:rPr>
-                        <a:t>安时终点</a:t>
-                      </a:r>
-                    </a:p>
-                  </a:txBody>
-                  <a:tcPr anchor="ctr">
-                    <a:solidFill>
-                      <a:srgbClr val="F0F0F0"/>
-                    </a:solidFill>
-                  </a:tcPr>
-                </a:tc>
-                <a:tc>
-                  <a:txBody>
-                    <a:bodyPr wrap="square" lIns="73152" rIns="73152"/>
-                    <a:lstStyle/>
-                    <a:p>
-                      <a:pPr algn="l"/>
-                      <a:r>
-                        <a:rPr sz="1600" b="1">
-                          <a:solidFill>
-                            <a:srgbClr val="222222"/>
-                          </a:solidFill>
-                          <a:latin typeface="Microsoft YaHei"/>
-                          <a:ea typeface="Microsoft YaHei"/>
-                        </a:rPr>
-                        <a:t>卡尔曼终点</a:t>
-                      </a:r>
-                    </a:p>
-                  </a:txBody>
-                  <a:tcPr anchor="ctr">
-                    <a:solidFill>
-                      <a:srgbClr val="F0F0F0"/>
-                    </a:solidFill>
-                  </a:tcPr>
-                </a:tc>
-                <a:tc>
-                  <a:txBody>
-                    <a:bodyPr wrap="square" lIns="73152" rIns="73152"/>
-                    <a:lstStyle/>
-                    <a:p>
-                      <a:pPr algn="l"/>
-                      <a:r>
-                        <a:rPr sz="1600" b="1">
-                          <a:solidFill>
-                            <a:srgbClr val="222222"/>
-                          </a:solidFill>
-                          <a:latin typeface="Microsoft YaHei"/>
-                          <a:ea typeface="Microsoft YaHei"/>
-                        </a:rPr>
-                        <a:t>开环电压</a:t>
-                      </a:r>
-                    </a:p>
-                  </a:txBody>
-                  <a:tcPr anchor="ctr">
-                    <a:solidFill>
-                      <a:srgbClr val="F0F0F0"/>
-                    </a:solidFill>
-                  </a:tcPr>
-                </a:tc>
-              </a:tr>
-              <a:tr h="365760">
-                <a:tc>
-                  <a:txBody>
-                    <a:bodyPr wrap="square" lIns="73152" rIns="73152"/>
-                    <a:lstStyle/>
-                    <a:p>
-                      <a:pPr algn="l"/>
-                      <a:r>
-                        <a:rPr sz="1600" b="0">
-                          <a:solidFill>
-                            <a:srgbClr val="222222"/>
-                          </a:solidFill>
-                          <a:latin typeface="Microsoft YaHei"/>
-                          <a:ea typeface="Microsoft YaHei"/>
-                        </a:rPr>
-                        <a:t>容量 95 Ah</a:t>
-                      </a:r>
-                    </a:p>
-                  </a:txBody>
-                  <a:tcPr anchor="ctr">
-                    <a:solidFill>
-                      <a:srgbClr val="FFFFFF"/>
-                    </a:solidFill>
-                  </a:tcPr>
-                </a:tc>
-                <a:tc>
-                  <a:txBody>
-                    <a:bodyPr wrap="square" lIns="73152" rIns="73152"/>
-                    <a:lstStyle/>
-                    <a:p>
-                      <a:pPr algn="l"/>
-                      <a:r>
-                        <a:rPr sz="1600" b="0">
-                          <a:solidFill>
-                            <a:srgbClr val="222222"/>
-                          </a:solidFill>
-                          <a:latin typeface="Microsoft YaHei"/>
-                          <a:ea typeface="Microsoft YaHei"/>
-                        </a:rPr>
-                        <a:t>−3.16 pp</a:t>
-                      </a:r>
-                    </a:p>
-                  </a:txBody>
-                  <a:tcPr anchor="ctr">
-                    <a:solidFill>
-                      <a:srgbClr val="FFFFFF"/>
-                    </a:solidFill>
-                  </a:tcPr>
-                </a:tc>
-                <a:tc>
-                  <a:txBody>
-                    <a:bodyPr wrap="square" lIns="73152" rIns="73152"/>
-                    <a:lstStyle/>
-                    <a:p>
-                      <a:pPr algn="l"/>
-                      <a:r>
-                        <a:rPr sz="1600" b="0">
-                          <a:solidFill>
-                            <a:srgbClr val="222222"/>
-                          </a:solidFill>
-                          <a:latin typeface="Microsoft YaHei"/>
-                          <a:ea typeface="Microsoft YaHei"/>
-                        </a:rPr>
-                        <a:t>+0.04 pp</a:t>
-                      </a:r>
-                    </a:p>
-                  </a:txBody>
-                  <a:tcPr anchor="ctr">
-                    <a:solidFill>
-                      <a:srgbClr val="FFFFFF"/>
-                    </a:solidFill>
-                  </a:tcPr>
-                </a:tc>
-                <a:tc>
-                  <a:txBody>
-                    <a:bodyPr wrap="square" lIns="73152" rIns="73152"/>
-                    <a:lstStyle/>
-                    <a:p>
-                      <a:pPr algn="l"/>
-                      <a:r>
-                        <a:rPr sz="1600" b="0">
-                          <a:solidFill>
-                            <a:srgbClr val="222222"/>
-                          </a:solidFill>
-                          <a:latin typeface="Microsoft YaHei"/>
-                          <a:ea typeface="Microsoft YaHei"/>
-                        </a:rPr>
-                        <a:t>21.9 mV</a:t>
-                      </a:r>
-                    </a:p>
-                  </a:txBody>
-                  <a:tcPr anchor="ctr">
-                    <a:solidFill>
-                      <a:srgbClr val="FFFFFF"/>
-                    </a:solidFill>
-                  </a:tcPr>
-                </a:tc>
-              </a:tr>
-              <a:tr h="365760">
-                <a:tc>
-                  <a:txBody>
-                    <a:bodyPr wrap="square" lIns="73152" rIns="73152"/>
-                    <a:lstStyle/>
-                    <a:p>
-                      <a:pPr algn="l"/>
-                      <a:r>
-                        <a:rPr sz="1600" b="0">
-                          <a:solidFill>
-                            <a:srgbClr val="222222"/>
-                          </a:solidFill>
-                          <a:latin typeface="Microsoft YaHei"/>
-                          <a:ea typeface="Microsoft YaHei"/>
-                        </a:rPr>
-                        <a:t>容量 105 Ah</a:t>
-                      </a:r>
-                    </a:p>
-                  </a:txBody>
-                  <a:tcPr anchor="ctr">
-                    <a:solidFill>
-                      <a:srgbClr val="FFFFFF"/>
-                    </a:solidFill>
-                  </a:tcPr>
-                </a:tc>
-                <a:tc>
-                  <a:txBody>
-                    <a:bodyPr wrap="square" lIns="73152" rIns="73152"/>
-                    <a:lstStyle/>
-                    <a:p>
-                      <a:pPr algn="l"/>
-                      <a:r>
-                        <a:rPr sz="1600" b="0">
-                          <a:solidFill>
-                            <a:srgbClr val="222222"/>
-                          </a:solidFill>
-                          <a:latin typeface="Microsoft YaHei"/>
-                          <a:ea typeface="Microsoft YaHei"/>
-                        </a:rPr>
-                        <a:t>+2.86 pp</a:t>
-                      </a:r>
-                    </a:p>
-                  </a:txBody>
-                  <a:tcPr anchor="ctr">
-                    <a:solidFill>
-                      <a:srgbClr val="FFFFFF"/>
-                    </a:solidFill>
-                  </a:tcPr>
-                </a:tc>
-                <a:tc>
-                  <a:txBody>
-                    <a:bodyPr wrap="square" lIns="73152" rIns="73152"/>
-                    <a:lstStyle/>
-                    <a:p>
-                      <a:pPr algn="l"/>
-                      <a:r>
-                        <a:rPr sz="1600" b="0">
-                          <a:solidFill>
-                            <a:srgbClr val="222222"/>
-                          </a:solidFill>
-                          <a:latin typeface="Microsoft YaHei"/>
-                          <a:ea typeface="Microsoft YaHei"/>
-                        </a:rPr>
-                        <a:t>+0.08 pp</a:t>
-                      </a:r>
-                    </a:p>
-                  </a:txBody>
-                  <a:tcPr anchor="ctr">
-                    <a:solidFill>
-                      <a:srgbClr val="FFFFFF"/>
-                    </a:solidFill>
-                  </a:tcPr>
-                </a:tc>
-                <a:tc>
-                  <a:txBody>
-                    <a:bodyPr wrap="square" lIns="73152" rIns="73152"/>
-                    <a:lstStyle/>
-                    <a:p>
-                      <a:pPr algn="l"/>
-                      <a:r>
-                        <a:rPr sz="1600" b="0">
-                          <a:solidFill>
-                            <a:srgbClr val="222222"/>
-                          </a:solidFill>
-                          <a:latin typeface="Microsoft YaHei"/>
-                          <a:ea typeface="Microsoft YaHei"/>
-                        </a:rPr>
-                        <a:t>9.5 mV</a:t>
-                      </a:r>
-                    </a:p>
-                  </a:txBody>
-                  <a:tcPr anchor="ctr">
-                    <a:solidFill>
-                      <a:srgbClr val="FFFFFF"/>
-                    </a:solidFill>
-                  </a:tcPr>
-                </a:tc>
-              </a:tr>
-              <a:tr h="365760">
-                <a:tc>
-                  <a:txBody>
-                    <a:bodyPr wrap="square" lIns="73152" rIns="73152"/>
-                    <a:lstStyle/>
-                    <a:p>
-                      <a:pPr algn="l"/>
-                      <a:r>
-                        <a:rPr sz="1600" b="0">
-                          <a:solidFill>
-                            <a:srgbClr val="222222"/>
-                          </a:solidFill>
-                          <a:latin typeface="Microsoft YaHei"/>
-                          <a:ea typeface="Microsoft YaHei"/>
-                        </a:rPr>
-                        <a:t>5 A 零偏</a:t>
-                      </a:r>
-                    </a:p>
-                  </a:txBody>
-                  <a:tcPr anchor="ctr">
-                    <a:solidFill>
-                      <a:srgbClr val="FFFFFF"/>
-                    </a:solidFill>
-                  </a:tcPr>
-                </a:tc>
-                <a:tc>
-                  <a:txBody>
-                    <a:bodyPr wrap="square" lIns="73152" rIns="73152"/>
-                    <a:lstStyle/>
-                    <a:p>
-                      <a:pPr algn="l"/>
-                      <a:r>
-                        <a:rPr sz="1600" b="0">
-                          <a:solidFill>
-                            <a:srgbClr val="222222"/>
-                          </a:solidFill>
-                          <a:latin typeface="Microsoft YaHei"/>
-                          <a:ea typeface="Microsoft YaHei"/>
-                        </a:rPr>
-                        <a:t>−10.0 pp</a:t>
-                      </a:r>
-                    </a:p>
-                  </a:txBody>
-                  <a:tcPr anchor="ctr">
-                    <a:solidFill>
-                      <a:srgbClr val="FFFFFF"/>
-                    </a:solidFill>
-                  </a:tcPr>
-                </a:tc>
-                <a:tc>
-                  <a:txBody>
-                    <a:bodyPr wrap="square" lIns="73152" rIns="73152"/>
-                    <a:lstStyle/>
-                    <a:p>
-                      <a:pPr algn="l"/>
-                      <a:r>
-                        <a:rPr sz="1600" b="0">
-                          <a:solidFill>
-                            <a:srgbClr val="222222"/>
-                          </a:solidFill>
-                          <a:latin typeface="Microsoft YaHei"/>
-                          <a:ea typeface="Microsoft YaHei"/>
-                        </a:rPr>
-                        <a:t>+1.40 pp</a:t>
-                      </a:r>
-                    </a:p>
-                  </a:txBody>
-                  <a:tcPr anchor="ctr">
-                    <a:solidFill>
-                      <a:srgbClr val="FFFFFF"/>
-                    </a:solidFill>
-                  </a:tcPr>
-                </a:tc>
-                <a:tc>
-                  <a:txBody>
-                    <a:bodyPr wrap="square" lIns="73152" rIns="73152"/>
-                    <a:lstStyle/>
-                    <a:p>
-                      <a:pPr algn="l"/>
-                      <a:r>
-                        <a:rPr sz="1600" b="0">
-                          <a:solidFill>
-                            <a:srgbClr val="222222"/>
-                          </a:solidFill>
-                          <a:latin typeface="Microsoft YaHei"/>
-                          <a:ea typeface="Microsoft YaHei"/>
-                        </a:rPr>
-                        <a:t>143 mV</a:t>
-                      </a:r>
-                    </a:p>
-                  </a:txBody>
-                  <a:tcPr anchor="ctr">
-                    <a:solidFill>
-                      <a:srgbClr val="FFFFFF"/>
-                    </a:solidFill>
-                  </a:tcPr>
-                </a:tc>
-              </a:tr>
-            </a:tbl>
-          </a:graphicData>
-        </a:graphic>
-      </p:graphicFrame>
-      <p:sp>
-        <p:nvSpPr>
-          <p:cNvPr id="4" name="TextBox 3"/>
+              <a:t>网络：策略、遗忘、抢误差</a:t>
+            </a:r>
+          </a:p>
+        </p:txBody>
+      </p:sp>
+      <p:sp>
+        <p:nvSpPr>
+          <p:cNvPr id="3" name="TextBox 2"/>
           <p:cNvSpPr txBox="1"/>
           <p:nvPr/>
         </p:nvSpPr>
         <p:spPr>
           <a:xfrm>
-            <a:off x="548640" y="2834640"/>
-            <a:ext cx="9601200" cy="1463040"/>
+            <a:off x="548640" y="960120"/>
+            <a:ext cx="5760720" cy="5303520"/>
           </a:xfrm>
           <a:prstGeom prst="rect">
             <a:avLst/>
@@ -6328,7 +5625,7 @@
                 <a:latin typeface="Microsoft YaHei"/>
                 <a:ea typeface="Microsoft YaHei"/>
               </a:rPr>
-              <a:t>工况：0.3C 放电 2 小时。仿真仍是 100 Ah。</a:t>
+              <a:t>过 10 mV 就每 0.1 秒一步。相邻两拍几乎一样，十几秒就是上百次同方向的梯度。</a:t>
             </a:r>
           </a:p>
           <a:p>
@@ -6348,7 +5645,47 @@
                 <a:latin typeface="Microsoft YaHei"/>
                 <a:ea typeface="Microsoft YaHei"/>
               </a:rPr>
-              <a:t>安时跑飞；卡尔曼用电压把 SOC 钉回去。若再把电压误差写进电阻，SOC 和内阻一起飞。</a:t>
+              <a:t>18 个数全体工况共用。停在一个点上更新，所有温度、所有 SOC 的读出一起动。这是灾难遗忘。</a:t>
+            </a:r>
+          </a:p>
+          <a:p>
+            <a:pPr algn="l">
+              <a:lnSpc>
+                <a:spcPct val="115000"/>
+              </a:lnSpc>
+              <a:spcAft>
+                <a:spcPts val="800"/>
+              </a:spcAft>
+            </a:pPr>
+            <a:r>
+              <a:rPr sz="1600" b="0">
+                <a:solidFill>
+                  <a:srgbClr val="222222"/>
+                </a:solidFill>
+                <a:latin typeface="Microsoft YaHei"/>
+                <a:ea typeface="Microsoft YaHei"/>
+              </a:rPr>
+              <a:t>每芯独立只挡住电芯 A 写进电芯 B，挡不住同一只电芯洗掉自己的旧工况。</a:t>
+            </a:r>
+          </a:p>
+          <a:p>
+            <a:pPr algn="l">
+              <a:lnSpc>
+                <a:spcPct val="115000"/>
+              </a:lnSpc>
+              <a:spcAft>
+                <a:spcPts val="800"/>
+              </a:spcAft>
+            </a:pPr>
+            <a:r>
+              <a:rPr sz="1600" b="0">
+                <a:solidFill>
+                  <a:srgbClr val="222222"/>
+                </a:solidFill>
+                <a:latin typeface="Microsoft YaHei"/>
+                <a:ea typeface="Microsoft YaHei"/>
+              </a:rPr>
+              <a:t>已经有 EKF，残差头还拿同一条电压误差按拍改电阻。滤波和创新头互相拧。</a:t>
             </a:r>
           </a:p>
         </p:txBody>
@@ -6402,7 +5739,7 @@
                 <a:latin typeface="Microsoft YaHei"/>
                 <a:ea typeface="Microsoft YaHei"/>
               </a:rPr>
-              <a:t>跑飞之后，会停在真值 +3% 附近</a:t>
+              <a:t>SOC：短窗口看不见漂，死区留下常偏</a:t>
             </a:r>
           </a:p>
         </p:txBody>
@@ -6445,7 +5782,7 @@
                 <a:latin typeface="Microsoft YaHei"/>
                 <a:ea typeface="Microsoft YaHei"/>
               </a:rPr>
-              <a:t>开环安时不会自己停。能稳住，说明 demo 用电压在往回拉。</a:t>
+              <a:t>他们已经有 EKF。误差先完全线性增长，过大约 2% 才慢慢收到 3% 多一点。</a:t>
             </a:r>
           </a:p>
           <a:p>
@@ -6465,7 +5802,7 @@
                 <a:latin typeface="Microsoft YaHei"/>
                 <a:ea typeface="Microsoft YaHei"/>
               </a:rPr>
-              <a:t>停在 +3% 而不是 0，是 10 mV 死区折到中段开路电压斜率上。</a:t>
+              <a:t>线性段：创新还小于 10 mV，滤波增益几乎为 0，等于开环安时。</a:t>
             </a:r>
           </a:p>
           <a:p>
@@ -6485,7 +5822,7 @@
                 <a:latin typeface="Microsoft YaHei"/>
                 <a:ea typeface="Microsoft YaHei"/>
               </a:rPr>
-              <a:t>中段大约每 3 mV 对应 1% SOC：10 mV ÷ 3 mV ≈ 3%。</a:t>
+              <a:t>2% 是创新刚摸到 10 mV；3% 多是死区边缘（约 10 mV ÷ 3 mV/%）。</a:t>
             </a:r>
           </a:p>
           <a:p>
@@ -6505,27 +5842,7 @@
                 <a:latin typeface="Microsoft YaHei"/>
                 <a:ea typeface="Microsoft YaHei"/>
               </a:rPr>
-              <a:t>这不是容量刚好错了 3%。那种误差会随安时继续长。</a:t>
-            </a:r>
-          </a:p>
-          <a:p>
-            <a:pPr algn="l">
-              <a:lnSpc>
-                <a:spcPct val="115000"/>
-              </a:lnSpc>
-              <a:spcAft>
-                <a:spcPts val="800"/>
-              </a:spcAft>
-            </a:pPr>
-            <a:r>
-              <a:rPr sz="1600" b="0">
-                <a:solidFill>
-                  <a:srgbClr val="222222"/>
-                </a:solidFill>
-                <a:latin typeface="Microsoft YaHei"/>
-                <a:ea typeface="Microsoft YaHei"/>
-              </a:rPr>
-              <a:t>我们的卡尔曼没有这道 SOC 死区。同样打到 105 Ah，安时 +2.86 pp，滤波终点只有 +0.08 pp。</a:t>
+              <a:t>OCV 小网最差 30 mV 能偏几个百分点，现场 +3% 更像死区，不是 30 mV 全折进去。</a:t>
             </a:r>
           </a:p>
         </p:txBody>
@@ -6579,7 +5896,7 @@
                 <a:latin typeface="Microsoft YaHei"/>
                 <a:ea typeface="Microsoft YaHei"/>
               </a:rPr>
-              <a:t>我们要补的不是小网，是这三件事</a:t>
+              <a:t>我们针对这些做什么</a:t>
             </a:r>
           </a:p>
         </p:txBody>
@@ -6622,7 +5939,7 @@
                 <a:latin typeface="Microsoft YaHei"/>
                 <a:ea typeface="Microsoft YaHei"/>
               </a:rPr>
-              <a:t>1. 时间拉长以后，SOC 还能不能钉住。用卡尔曼吃端电压，不要让电阻头去跟斜坡。</a:t>
+              <a:t>不是再做一个更炫的小网，也不是「我们多上一个卡尔曼」。</a:t>
             </a:r>
           </a:p>
           <a:p>
@@ -6642,7 +5959,7 @@
                 <a:latin typeface="Microsoft YaHei"/>
                 <a:ea typeface="Microsoft YaHei"/>
               </a:rPr>
-              <a:t>2. 电压对不上时，到底该不该改电阻表。四种「新」不能用同一套验收。</a:t>
+              <a:t>EKF 每拍吃创新，不设 10 mV 的 SOC 死区；电阻头不要和滤波抢同一条误差。</a:t>
             </a:r>
           </a:p>
           <a:p>
@@ -6662,7 +5979,7 @@
                 <a:latin typeface="Microsoft YaHei"/>
                 <a:ea typeface="Microsoft YaHei"/>
               </a:rPr>
-              <a:t>3. 不要照搬「过 10 mV 就每 0.1 秒反传」。那是没回放时的展台折中。</a:t>
+              <a:t>电阻增量离线、按任务选档：涨阻只动两个乘子；缺温区用回放；没变就冻结；拆不开就不动表。</a:t>
             </a:r>
           </a:p>
           <a:p>
@@ -6682,7 +5999,7 @@
                 <a:latin typeface="Microsoft YaHei"/>
                 <a:ea typeface="Microsoft YaHei"/>
               </a:rPr>
-              <a:t>一律再训练，新年份电压往往会降，旧工况的表却被改坏。</a:t>
+              <a:t>不按拍反传整张网。有激励才动电阻。</a:t>
             </a:r>
           </a:p>
         </p:txBody>
